--- a/knf/decks/d2p1.pptx
+++ b/knf/decks/d2p1.pptx
@@ -4571,7 +4571,7 @@
                 <a:ea typeface="Pretendard"/>
                 <a:cs typeface="Pretendard"/>
               </a:rPr>
-              <a:t>45분 뒤에는</a:t>
+              <a:t>50분 뒤에는</a:t>
             </a:r>
           </a:p>
         </p:txBody>

--- a/knf/decks/d2p1.pptx
+++ b/knf/decks/d2p1.pptx
@@ -3099,7 +3099,7 @@
       <p:grpSpPr/>
       <p:sp>
         <p:nvSpPr>
-          <p:cNvPr id="2" name="Oval 1"/>
+          <p:cNvPr id="2" name="deckgen:decor"/>
           <p:cNvSpPr/>
           <p:nvPr/>
         </p:nvSpPr>
@@ -3129,7 +3129,7 @@
       </p:sp>
       <p:sp>
         <p:nvSpPr>
-          <p:cNvPr id="3" name="Oval 2"/>
+          <p:cNvPr id="3" name="deckgen:decor"/>
           <p:cNvSpPr/>
           <p:nvPr/>
         </p:nvSpPr>
@@ -3159,7 +3159,7 @@
       </p:sp>
       <p:sp>
         <p:nvSpPr>
-          <p:cNvPr id="4" name="Oval 3"/>
+          <p:cNvPr id="4" name="deckgen:decor"/>
           <p:cNvSpPr/>
           <p:nvPr/>
         </p:nvSpPr>
@@ -3189,7 +3189,7 @@
       </p:sp>
       <p:sp>
         <p:nvSpPr>
-          <p:cNvPr id="5" name="Rectangle 4"/>
+          <p:cNvPr id="5" name="deckgen:decor"/>
           <p:cNvSpPr/>
           <p:nvPr/>
         </p:nvSpPr>
@@ -3219,7 +3219,7 @@
       </p:sp>
       <p:sp>
         <p:nvSpPr>
-          <p:cNvPr id="6" name="Oval 5"/>
+          <p:cNvPr id="6" name="deckgen:decor"/>
           <p:cNvSpPr/>
           <p:nvPr/>
         </p:nvSpPr>
@@ -3249,7 +3249,7 @@
       </p:sp>
       <p:sp>
         <p:nvSpPr>
-          <p:cNvPr id="7" name="Oval 6"/>
+          <p:cNvPr id="7" name="deckgen:decor"/>
           <p:cNvSpPr/>
           <p:nvPr/>
         </p:nvSpPr>
@@ -3279,7 +3279,7 @@
       </p:sp>
       <p:sp>
         <p:nvSpPr>
-          <p:cNvPr id="8" name="Oval 7"/>
+          <p:cNvPr id="8" name="deckgen:decor"/>
           <p:cNvSpPr/>
           <p:nvPr/>
         </p:nvSpPr>
@@ -3309,7 +3309,7 @@
       </p:sp>
       <p:sp>
         <p:nvSpPr>
-          <p:cNvPr id="9" name="Oval 8"/>
+          <p:cNvPr id="9" name="deckgen:decor"/>
           <p:cNvSpPr/>
           <p:nvPr/>
         </p:nvSpPr>
@@ -3339,7 +3339,7 @@
       </p:sp>
       <p:sp>
         <p:nvSpPr>
-          <p:cNvPr id="10" name="Rectangle 9"/>
+          <p:cNvPr id="10" name="deckgen:decor"/>
           <p:cNvSpPr/>
           <p:nvPr/>
         </p:nvSpPr>
@@ -3599,7 +3599,7 @@
       <p:grpSpPr/>
       <p:sp>
         <p:nvSpPr>
-          <p:cNvPr id="2" name="Oval 1"/>
+          <p:cNvPr id="2" name="deckgen:decor"/>
           <p:cNvSpPr/>
           <p:nvPr/>
         </p:nvSpPr>
@@ -3629,7 +3629,7 @@
       </p:sp>
       <p:sp>
         <p:nvSpPr>
-          <p:cNvPr id="3" name="Oval 2"/>
+          <p:cNvPr id="3" name="deckgen:decor"/>
           <p:cNvSpPr/>
           <p:nvPr/>
         </p:nvSpPr>
@@ -4406,7 +4406,7 @@
       <p:grpSpPr/>
       <p:sp>
         <p:nvSpPr>
-          <p:cNvPr id="2" name="Oval 1"/>
+          <p:cNvPr id="2" name="deckgen:decor"/>
           <p:cNvSpPr/>
           <p:nvPr/>
         </p:nvSpPr>
@@ -4436,7 +4436,7 @@
       </p:sp>
       <p:sp>
         <p:nvSpPr>
-          <p:cNvPr id="3" name="Oval 2"/>
+          <p:cNvPr id="3" name="deckgen:decor"/>
           <p:cNvSpPr/>
           <p:nvPr/>
         </p:nvSpPr>
@@ -4466,7 +4466,7 @@
       </p:sp>
       <p:sp>
         <p:nvSpPr>
-          <p:cNvPr id="4" name="Oval 3"/>
+          <p:cNvPr id="4" name="deckgen:decor"/>
           <p:cNvSpPr/>
           <p:nvPr/>
         </p:nvSpPr>
@@ -5251,7 +5251,7 @@
       <p:grpSpPr/>
       <p:sp>
         <p:nvSpPr>
-          <p:cNvPr id="2" name="Oval 1"/>
+          <p:cNvPr id="2" name="deckgen:decor"/>
           <p:cNvSpPr/>
           <p:nvPr/>
         </p:nvSpPr>
@@ -5281,7 +5281,7 @@
       </p:sp>
       <p:sp>
         <p:nvSpPr>
-          <p:cNvPr id="3" name="Oval 2"/>
+          <p:cNvPr id="3" name="deckgen:decor"/>
           <p:cNvSpPr/>
           <p:nvPr/>
         </p:nvSpPr>
@@ -5311,7 +5311,7 @@
       </p:sp>
       <p:sp>
         <p:nvSpPr>
-          <p:cNvPr id="4" name="Oval 3"/>
+          <p:cNvPr id="4" name="deckgen:decor"/>
           <p:cNvSpPr/>
           <p:nvPr/>
         </p:nvSpPr>
@@ -6445,7 +6445,7 @@
       <p:grpSpPr/>
       <p:sp>
         <p:nvSpPr>
-          <p:cNvPr id="2" name="Oval 1"/>
+          <p:cNvPr id="2" name="deckgen:decor"/>
           <p:cNvSpPr/>
           <p:nvPr/>
         </p:nvSpPr>
@@ -6475,7 +6475,7 @@
       </p:sp>
       <p:sp>
         <p:nvSpPr>
-          <p:cNvPr id="3" name="Oval 2"/>
+          <p:cNvPr id="3" name="deckgen:decor"/>
           <p:cNvSpPr/>
           <p:nvPr/>
         </p:nvSpPr>
@@ -6505,7 +6505,7 @@
       </p:sp>
       <p:sp>
         <p:nvSpPr>
-          <p:cNvPr id="4" name="Oval 3"/>
+          <p:cNvPr id="4" name="deckgen:decor"/>
           <p:cNvSpPr/>
           <p:nvPr/>
         </p:nvSpPr>
@@ -7931,7 +7931,7 @@
       <p:grpSpPr/>
       <p:sp>
         <p:nvSpPr>
-          <p:cNvPr id="2" name="Oval 1"/>
+          <p:cNvPr id="2" name="deckgen:decor"/>
           <p:cNvSpPr/>
           <p:nvPr/>
         </p:nvSpPr>
@@ -7961,7 +7961,7 @@
       </p:sp>
       <p:sp>
         <p:nvSpPr>
-          <p:cNvPr id="3" name="Oval 2"/>
+          <p:cNvPr id="3" name="deckgen:decor"/>
           <p:cNvSpPr/>
           <p:nvPr/>
         </p:nvSpPr>
@@ -7991,7 +7991,7 @@
       </p:sp>
       <p:sp>
         <p:nvSpPr>
-          <p:cNvPr id="4" name="Oval 3"/>
+          <p:cNvPr id="4" name="deckgen:decor"/>
           <p:cNvSpPr/>
           <p:nvPr/>
         </p:nvSpPr>
@@ -8958,7 +8958,7 @@
       <p:grpSpPr/>
       <p:sp>
         <p:nvSpPr>
-          <p:cNvPr id="2" name="Oval 1"/>
+          <p:cNvPr id="2" name="deckgen:decor"/>
           <p:cNvSpPr/>
           <p:nvPr/>
         </p:nvSpPr>
@@ -8988,7 +8988,7 @@
       </p:sp>
       <p:sp>
         <p:nvSpPr>
-          <p:cNvPr id="3" name="Oval 2"/>
+          <p:cNvPr id="3" name="deckgen:decor"/>
           <p:cNvSpPr/>
           <p:nvPr/>
         </p:nvSpPr>
@@ -9018,7 +9018,7 @@
       </p:sp>
       <p:sp>
         <p:nvSpPr>
-          <p:cNvPr id="4" name="Oval 3"/>
+          <p:cNvPr id="4" name="deckgen:decor"/>
           <p:cNvSpPr/>
           <p:nvPr/>
         </p:nvSpPr>
@@ -10894,7 +10894,7 @@
       <p:grpSpPr/>
       <p:sp>
         <p:nvSpPr>
-          <p:cNvPr id="2" name="Oval 1"/>
+          <p:cNvPr id="2" name="deckgen:decor"/>
           <p:cNvSpPr/>
           <p:nvPr/>
         </p:nvSpPr>
@@ -10924,7 +10924,7 @@
       </p:sp>
       <p:sp>
         <p:nvSpPr>
-          <p:cNvPr id="3" name="Oval 2"/>
+          <p:cNvPr id="3" name="deckgen:decor"/>
           <p:cNvSpPr/>
           <p:nvPr/>
         </p:nvSpPr>
@@ -10954,7 +10954,7 @@
       </p:sp>
       <p:sp>
         <p:nvSpPr>
-          <p:cNvPr id="4" name="Oval 3"/>
+          <p:cNvPr id="4" name="deckgen:decor"/>
           <p:cNvSpPr/>
           <p:nvPr/>
         </p:nvSpPr>
@@ -13055,7 +13055,7 @@
       <p:grpSpPr/>
       <p:sp>
         <p:nvSpPr>
-          <p:cNvPr id="2" name="Oval 1"/>
+          <p:cNvPr id="2" name="deckgen:decor"/>
           <p:cNvSpPr/>
           <p:nvPr/>
         </p:nvSpPr>
@@ -13085,7 +13085,7 @@
       </p:sp>
       <p:sp>
         <p:nvSpPr>
-          <p:cNvPr id="3" name="Oval 2"/>
+          <p:cNvPr id="3" name="deckgen:decor"/>
           <p:cNvSpPr/>
           <p:nvPr/>
         </p:nvSpPr>
@@ -13115,7 +13115,7 @@
       </p:sp>
       <p:sp>
         <p:nvSpPr>
-          <p:cNvPr id="4" name="Oval 3"/>
+          <p:cNvPr id="4" name="deckgen:decor"/>
           <p:cNvSpPr/>
           <p:nvPr/>
         </p:nvSpPr>
@@ -13321,7 +13321,7 @@
       </p:sp>
       <p:sp>
         <p:nvSpPr>
-          <p:cNvPr id="10" name="TextBox 9"/>
+          <p:cNvPr id="10" name="deckgen:ornament"/>
           <p:cNvSpPr txBox="1"/>
           <p:nvPr/>
         </p:nvSpPr>
@@ -13506,7 +13506,7 @@
       </p:sp>
       <p:sp>
         <p:nvSpPr>
-          <p:cNvPr id="14" name="TextBox 13"/>
+          <p:cNvPr id="14" name="deckgen:ornament"/>
           <p:cNvSpPr txBox="1"/>
           <p:nvPr/>
         </p:nvSpPr>
@@ -13691,7 +13691,7 @@
       </p:sp>
       <p:sp>
         <p:nvSpPr>
-          <p:cNvPr id="18" name="TextBox 17"/>
+          <p:cNvPr id="18" name="deckgen:ornament"/>
           <p:cNvSpPr txBox="1"/>
           <p:nvPr/>
         </p:nvSpPr>
@@ -14013,7 +14013,7 @@
       <p:grpSpPr/>
       <p:sp>
         <p:nvSpPr>
-          <p:cNvPr id="2" name="Oval 1"/>
+          <p:cNvPr id="2" name="deckgen:decor"/>
           <p:cNvSpPr/>
           <p:nvPr/>
         </p:nvSpPr>
@@ -14043,7 +14043,7 @@
       </p:sp>
       <p:sp>
         <p:nvSpPr>
-          <p:cNvPr id="3" name="Oval 2"/>
+          <p:cNvPr id="3" name="deckgen:decor"/>
           <p:cNvSpPr/>
           <p:nvPr/>
         </p:nvSpPr>
@@ -14073,7 +14073,7 @@
       </p:sp>
       <p:sp>
         <p:nvSpPr>
-          <p:cNvPr id="4" name="Oval 3"/>
+          <p:cNvPr id="4" name="deckgen:decor"/>
           <p:cNvSpPr/>
           <p:nvPr/>
         </p:nvSpPr>
